--- a/lectures/Lecture_03/slides/Lecture_03_Backpropagation_and_Automatic_Differentiation.pptx
+++ b/lectures/Lecture_03/slides/Lecture_03_Backpropagation_and_Automatic_Differentiation.pptx
@@ -6859,8 +6859,8 @@
         </p:nvSpPr>
         <p:spPr>
           <a:xfrm>
-            <a:off x="658368" y="1883664"/>
-            <a:ext cx="146304" cy="146304"/>
+            <a:off x="658368" y="1837944"/>
+            <a:ext cx="128016" cy="128016"/>
           </a:xfrm>
           <a:prstGeom prst="rect">
             <a:avLst/>
@@ -6903,8 +6903,8 @@
         </p:nvSpPr>
         <p:spPr>
           <a:xfrm>
-            <a:off x="1042416" y="1700784"/>
-            <a:ext cx="10490911" cy="640080"/>
+            <a:off x="1024128" y="1691640"/>
+            <a:ext cx="10509199" cy="658368"/>
           </a:xfrm>
           <a:prstGeom prst="rect">
             <a:avLst/>
@@ -6945,8 +6945,8 @@
         </p:nvSpPr>
         <p:spPr>
           <a:xfrm>
-            <a:off x="658368" y="2596896"/>
-            <a:ext cx="146304" cy="146304"/>
+            <a:off x="658368" y="2551176"/>
+            <a:ext cx="128016" cy="128016"/>
           </a:xfrm>
           <a:prstGeom prst="rect">
             <a:avLst/>
@@ -6989,8 +6989,8 @@
         </p:nvSpPr>
         <p:spPr>
           <a:xfrm>
-            <a:off x="1042416" y="2414016"/>
-            <a:ext cx="10490911" cy="640080"/>
+            <a:off x="1024128" y="2404872"/>
+            <a:ext cx="10509199" cy="658368"/>
           </a:xfrm>
           <a:prstGeom prst="rect">
             <a:avLst/>
@@ -7031,8 +7031,8 @@
         </p:nvSpPr>
         <p:spPr>
           <a:xfrm>
-            <a:off x="658368" y="3310128"/>
-            <a:ext cx="146304" cy="146304"/>
+            <a:off x="658368" y="3264408"/>
+            <a:ext cx="128016" cy="128016"/>
           </a:xfrm>
           <a:prstGeom prst="rect">
             <a:avLst/>
@@ -7075,8 +7075,8 @@
         </p:nvSpPr>
         <p:spPr>
           <a:xfrm>
-            <a:off x="1042416" y="3127248"/>
-            <a:ext cx="10490911" cy="640080"/>
+            <a:off x="1024128" y="3118104"/>
+            <a:ext cx="10509199" cy="658368"/>
           </a:xfrm>
           <a:prstGeom prst="rect">
             <a:avLst/>
@@ -7117,8 +7117,8 @@
         </p:nvSpPr>
         <p:spPr>
           <a:xfrm>
-            <a:off x="658368" y="4023360"/>
-            <a:ext cx="146304" cy="146304"/>
+            <a:off x="658368" y="3977640"/>
+            <a:ext cx="128016" cy="128016"/>
           </a:xfrm>
           <a:prstGeom prst="rect">
             <a:avLst/>
@@ -7161,8 +7161,8 @@
         </p:nvSpPr>
         <p:spPr>
           <a:xfrm>
-            <a:off x="1042416" y="3840480"/>
-            <a:ext cx="10490911" cy="640080"/>
+            <a:off x="1024128" y="3831336"/>
+            <a:ext cx="10509199" cy="658368"/>
           </a:xfrm>
           <a:prstGeom prst="rect">
             <a:avLst/>
@@ -7203,8 +7203,8 @@
         </p:nvSpPr>
         <p:spPr>
           <a:xfrm>
-            <a:off x="658368" y="4736592"/>
-            <a:ext cx="146304" cy="146304"/>
+            <a:off x="658368" y="4690872"/>
+            <a:ext cx="128016" cy="128016"/>
           </a:xfrm>
           <a:prstGeom prst="rect">
             <a:avLst/>
@@ -7247,8 +7247,8 @@
         </p:nvSpPr>
         <p:spPr>
           <a:xfrm>
-            <a:off x="1042416" y="4553712"/>
-            <a:ext cx="10490911" cy="640080"/>
+            <a:off x="1024128" y="4544568"/>
+            <a:ext cx="10509199" cy="658368"/>
           </a:xfrm>
           <a:prstGeom prst="rect">
             <a:avLst/>
@@ -8219,8 +8219,8 @@
         </p:nvSpPr>
         <p:spPr>
           <a:xfrm>
-            <a:off x="658368" y="1764792"/>
-            <a:ext cx="502920" cy="457200"/>
+            <a:off x="658368" y="1728216"/>
+            <a:ext cx="502920" cy="530352"/>
           </a:xfrm>
           <a:prstGeom prst="rect">
             <a:avLst/>
@@ -8261,8 +8261,8 @@
         </p:nvSpPr>
         <p:spPr>
           <a:xfrm>
-            <a:off x="1344168" y="1783080"/>
-            <a:ext cx="10189159" cy="457200"/>
+            <a:off x="1344168" y="1728216"/>
+            <a:ext cx="10189159" cy="530352"/>
           </a:xfrm>
           <a:prstGeom prst="rect">
             <a:avLst/>
@@ -8303,7 +8303,7 @@
         </p:nvSpPr>
         <p:spPr>
           <a:xfrm>
-            <a:off x="658368" y="2267712"/>
+            <a:off x="658368" y="2276856"/>
             <a:ext cx="10874959" cy="9525"/>
           </a:xfrm>
           <a:prstGeom prst="rect">
@@ -8347,8 +8347,8 @@
         </p:nvSpPr>
         <p:spPr>
           <a:xfrm>
-            <a:off x="658368" y="2368296"/>
-            <a:ext cx="502920" cy="457200"/>
+            <a:off x="658368" y="2331720"/>
+            <a:ext cx="502920" cy="530352"/>
           </a:xfrm>
           <a:prstGeom prst="rect">
             <a:avLst/>
@@ -8389,8 +8389,8 @@
         </p:nvSpPr>
         <p:spPr>
           <a:xfrm>
-            <a:off x="1344168" y="2386584"/>
-            <a:ext cx="10189159" cy="457200"/>
+            <a:off x="1344168" y="2331720"/>
+            <a:ext cx="10189159" cy="530352"/>
           </a:xfrm>
           <a:prstGeom prst="rect">
             <a:avLst/>
@@ -8431,7 +8431,7 @@
         </p:nvSpPr>
         <p:spPr>
           <a:xfrm>
-            <a:off x="658368" y="2871216"/>
+            <a:off x="658368" y="2880360"/>
             <a:ext cx="10874959" cy="9525"/>
           </a:xfrm>
           <a:prstGeom prst="rect">
@@ -8475,8 +8475,8 @@
         </p:nvSpPr>
         <p:spPr>
           <a:xfrm>
-            <a:off x="658368" y="2971800"/>
-            <a:ext cx="502920" cy="457200"/>
+            <a:off x="658368" y="2935224"/>
+            <a:ext cx="502920" cy="530352"/>
           </a:xfrm>
           <a:prstGeom prst="rect">
             <a:avLst/>
@@ -8517,8 +8517,8 @@
         </p:nvSpPr>
         <p:spPr>
           <a:xfrm>
-            <a:off x="1344168" y="2990088"/>
-            <a:ext cx="10189159" cy="457200"/>
+            <a:off x="1344168" y="2935224"/>
+            <a:ext cx="10189159" cy="530352"/>
           </a:xfrm>
           <a:prstGeom prst="rect">
             <a:avLst/>
@@ -8559,7 +8559,7 @@
         </p:nvSpPr>
         <p:spPr>
           <a:xfrm>
-            <a:off x="658368" y="3474720"/>
+            <a:off x="658368" y="3483864"/>
             <a:ext cx="10874959" cy="9525"/>
           </a:xfrm>
           <a:prstGeom prst="rect">
@@ -8603,8 +8603,8 @@
         </p:nvSpPr>
         <p:spPr>
           <a:xfrm>
-            <a:off x="658368" y="3575304"/>
-            <a:ext cx="502920" cy="457200"/>
+            <a:off x="658368" y="3538728"/>
+            <a:ext cx="502920" cy="530352"/>
           </a:xfrm>
           <a:prstGeom prst="rect">
             <a:avLst/>
@@ -8645,8 +8645,8 @@
         </p:nvSpPr>
         <p:spPr>
           <a:xfrm>
-            <a:off x="1344168" y="3593592"/>
-            <a:ext cx="10189159" cy="457200"/>
+            <a:off x="1344168" y="3538728"/>
+            <a:ext cx="10189159" cy="530352"/>
           </a:xfrm>
           <a:prstGeom prst="rect">
             <a:avLst/>
@@ -8687,7 +8687,7 @@
         </p:nvSpPr>
         <p:spPr>
           <a:xfrm>
-            <a:off x="658368" y="4078224"/>
+            <a:off x="658368" y="4087368"/>
             <a:ext cx="10874959" cy="9525"/>
           </a:xfrm>
           <a:prstGeom prst="rect">
@@ -8731,8 +8731,8 @@
         </p:nvSpPr>
         <p:spPr>
           <a:xfrm>
-            <a:off x="658368" y="4178808"/>
-            <a:ext cx="502920" cy="457200"/>
+            <a:off x="658368" y="4142232"/>
+            <a:ext cx="502920" cy="530352"/>
           </a:xfrm>
           <a:prstGeom prst="rect">
             <a:avLst/>
@@ -8773,8 +8773,8 @@
         </p:nvSpPr>
         <p:spPr>
           <a:xfrm>
-            <a:off x="1344168" y="4197096"/>
-            <a:ext cx="10189159" cy="457200"/>
+            <a:off x="1344168" y="4142232"/>
+            <a:ext cx="10189159" cy="530352"/>
           </a:xfrm>
           <a:prstGeom prst="rect">
             <a:avLst/>
@@ -8815,7 +8815,7 @@
         </p:nvSpPr>
         <p:spPr>
           <a:xfrm>
-            <a:off x="658368" y="4681728"/>
+            <a:off x="658368" y="4690872"/>
             <a:ext cx="10874959" cy="9525"/>
           </a:xfrm>
           <a:prstGeom prst="rect">
@@ -8859,8 +8859,8 @@
         </p:nvSpPr>
         <p:spPr>
           <a:xfrm>
-            <a:off x="658368" y="4892040"/>
-            <a:ext cx="10874959" cy="457200"/>
+            <a:off x="658368" y="4818888"/>
+            <a:ext cx="10874959" cy="411480"/>
           </a:xfrm>
           <a:prstGeom prst="rect">
             <a:avLst/>
@@ -8882,7 +8882,7 @@
               </a:spcAft>
             </a:pPr>
             <a:r>
-              <a:rPr sz="1400" b="0" i="1">
+              <a:rPr sz="1300" b="0" i="1">
                 <a:solidFill>
                   <a:srgbClr val="5A6375"/>
                 </a:solidFill>
